--- a/dist/초2/과학/생물과변화/초2_과학_생물과변화_01_식물이자라는모습_학생용.pptx
+++ b/dist/초2/과학/생물과변화/초2_과학_생물과변화_01_식물이자라는모습_학생용.pptx
@@ -117,43 +117,43 @@
   <p:extLst>
     <p:ext uri="{521415D9-36F7-43E2-AB2F-B90AF26B5E84}">
       <p14:sectionLst xmlns:p14="http://schemas.microsoft.com/office/powerpoint/2010/main">
-        <p14:section name="도입" id="{98ac48f6-bf79-18dc-301e-98012b914f13}">
+        <p14:section name="도입" id="{8086ac05-89b3-91af-3393-399aa90770cc}">
           <p14:sldIdLst>
             <p14:sldId id="256"/>
             <p14:sldId id="257"/>
           </p14:sldIdLst>
         </p14:section>
-        <p14:section name="개념" id="{43e94498-57af-860d-9c6a-70c669c8e5b3}">
+        <p14:section name="개념" id="{e18938fd-e1bc-3b2b-8e99-40add5c7a3e0}">
           <p14:sldIdLst>
             <p14:sldId id="258"/>
             <p14:sldId id="259"/>
             <p14:sldId id="261"/>
           </p14:sldIdLst>
         </p14:section>
-        <p14:section name="연습" id="{9a644076-840b-aed8-0fab-2383088c430d}">
+        <p14:section name="연습" id="{1211688f-3d46-d130-ed68-ebacec159633}">
           <p14:sldIdLst>
             <p14:sldId id="260"/>
             <p14:sldId id="262"/>
             <p14:sldId id="263"/>
           </p14:sldIdLst>
         </p14:section>
-        <p14:section name="개념" id="{0f77d179-5876-0e3a-0166-823f3b1b33f9}">
+        <p14:section name="개념" id="{2769aae9-7463-ad70-f7cc-d5a9d071f97d}">
           <p14:sldIdLst/>
         </p14:section>
-        <p14:section name="연습" id="{1cda833a-97e6-5e5e-da45-26f21014c714}">
+        <p14:section name="연습" id="{5cf370ea-562c-ab87-8f7c-e70a91171183}">
           <p14:sldIdLst/>
         </p14:section>
-        <p14:section name="확인" id="{465e1028-5e50-2cea-36b1-5ba532e8ee2b}">
+        <p14:section name="확인" id="{8eec36f4-dbbe-b78f-4d39-bad21a749666}">
           <p14:sldIdLst>
             <p14:sldId id="264"/>
           </p14:sldIdLst>
         </p14:section>
-        <p14:section name="정리" id="{3e0bb2bc-6a15-bdde-97b6-b12d7ff46d58}">
+        <p14:section name="정리" id="{cf9f7f50-f83b-60b4-3a88-a6d6203e4e55}">
           <p14:sldIdLst>
             <p14:sldId id="265"/>
           </p14:sldIdLst>
         </p14:section>
-        <p14:section name="보충" id="{e6c3cf74-70f2-aeff-37b4-856d7c32821a}">
+        <p14:section name="보충" id="{e6d2fc88-c59f-c5dd-e23f-d6b17fffe641}">
           <p14:sldIdLst>
             <p14:sldId id="266"/>
           </p14:sldIdLst>
